--- a/figures/all_figures.pptx
+++ b/figures/all_figures.pptx
@@ -6,12 +6,13 @@
   </p:sldMasterIdLst>
   <p:sldIdLst>
     <p:sldId id="257" r:id="rId2"/>
-    <p:sldId id="258" r:id="rId3"/>
-    <p:sldId id="259" r:id="rId4"/>
-    <p:sldId id="260" r:id="rId5"/>
-    <p:sldId id="261" r:id="rId6"/>
-    <p:sldId id="262" r:id="rId7"/>
-    <p:sldId id="263" r:id="rId8"/>
+    <p:sldId id="265" r:id="rId3"/>
+    <p:sldId id="258" r:id="rId4"/>
+    <p:sldId id="259" r:id="rId5"/>
+    <p:sldId id="260" r:id="rId6"/>
+    <p:sldId id="261" r:id="rId7"/>
+    <p:sldId id="262" r:id="rId8"/>
+    <p:sldId id="263" r:id="rId9"/>
   </p:sldIdLst>
   <p:sldSz cx="12192000" cy="6858000"/>
   <p:notesSz cx="6858000" cy="9144000"/>
@@ -3359,8 +3360,12 @@
           <a:p>
             <a:pPr algn="ctr"/>
             <a:r>
+              <a:rPr lang="en-US" sz="3200" b="1" dirty="0" err="1"/>
+              <a:t>Github</a:t>
+            </a:r>
+            <a:r>
               <a:rPr lang="en-US" sz="3200" b="1" dirty="0"/>
-              <a:t>Figure 1</a:t>
+              <a:t> Link</a:t>
             </a:r>
             <a:endParaRPr lang="en-US" sz="3200" b="1" dirty="0">
               <a:solidFill>
@@ -3370,12 +3375,160 @@
           </a:p>
         </p:txBody>
       </p:sp>
+      <p:sp>
+        <p:nvSpPr>
+          <p:cNvPr id="83" name="Rectangle 82">
+            <a:extLst>
+              <a:ext uri="{FF2B5EF4-FFF2-40B4-BE49-F238E27FC236}">
+                <a16:creationId xmlns:a16="http://schemas.microsoft.com/office/drawing/2014/main" id="{821CC9C6-878E-9C73-58D6-184ADDAAF925}"/>
+              </a:ext>
+            </a:extLst>
+          </p:cNvPr>
+          <p:cNvSpPr/>
+          <p:nvPr/>
+        </p:nvSpPr>
+        <p:spPr>
+          <a:xfrm>
+            <a:off x="3757421" y="1859340"/>
+            <a:ext cx="4677158" cy="2554545"/>
+          </a:xfrm>
+          <a:prstGeom prst="rect">
+            <a:avLst/>
+          </a:prstGeom>
+          <a:solidFill>
+            <a:schemeClr val="bg1"/>
+          </a:solidFill>
+        </p:spPr>
+        <p:txBody>
+          <a:bodyPr wrap="square" rtlCol="0" anchor="ctr">
+            <a:spAutoFit/>
+          </a:bodyPr>
+          <a:lstStyle/>
+          <a:p>
+            <a:pPr algn="ctr"/>
+            <a:r>
+              <a:rPr lang="en-US" sz="3200" b="1" dirty="0">
+                <a:hlinkClick r:id="rId2"/>
+              </a:rPr>
+              <a:t>https://</a:t>
+            </a:r>
+            <a:r>
+              <a:rPr lang="en-US" sz="3200" b="1" dirty="0" err="1">
+                <a:hlinkClick r:id="rId2"/>
+              </a:rPr>
+              <a:t>github.com</a:t>
+            </a:r>
+            <a:r>
+              <a:rPr lang="en-US" sz="3200" b="1" dirty="0">
+                <a:hlinkClick r:id="rId2"/>
+              </a:rPr>
+              <a:t>/</a:t>
+            </a:r>
+            <a:r>
+              <a:rPr lang="en-US" sz="3200" b="1" dirty="0" err="1">
+                <a:hlinkClick r:id="rId2"/>
+              </a:rPr>
+              <a:t>petertzelios</a:t>
+            </a:r>
+            <a:r>
+              <a:rPr lang="en-US" sz="3200" b="1" dirty="0">
+                <a:hlinkClick r:id="rId2"/>
+              </a:rPr>
+              <a:t>/Adapting-ESM-2-to-Predict-the-Effect-of-Multiple-Interacting-Mutations-.git</a:t>
+            </a:r>
+            <a:endParaRPr lang="en-US" sz="3200" b="1" dirty="0">
+              <a:solidFill>
+                <a:schemeClr val="tx1"/>
+              </a:solidFill>
+            </a:endParaRPr>
+          </a:p>
+        </p:txBody>
+      </p:sp>
+    </p:spTree>
+    <p:extLst>
+      <p:ext uri="{BB962C8B-B14F-4D97-AF65-F5344CB8AC3E}">
+        <p14:creationId xmlns:p14="http://schemas.microsoft.com/office/powerpoint/2010/main" val="2177176907"/>
+      </p:ext>
+    </p:extLst>
+  </p:cSld>
+  <p:clrMapOvr>
+    <a:masterClrMapping/>
+  </p:clrMapOvr>
+</p:sld>
+</file>
+
+<file path=ppt/slides/slide2.xml><?xml version="1.0" encoding="utf-8"?>
+<p:sld xmlns:a="http://schemas.openxmlformats.org/drawingml/2006/main" xmlns:r="http://schemas.openxmlformats.org/officeDocument/2006/relationships" xmlns:p="http://schemas.openxmlformats.org/presentationml/2006/main">
+  <p:cSld>
+    <p:spTree>
+      <p:nvGrpSpPr>
+        <p:cNvPr id="1" name="">
+          <a:extLst>
+            <a:ext uri="{FF2B5EF4-FFF2-40B4-BE49-F238E27FC236}">
+              <a16:creationId xmlns:a16="http://schemas.microsoft.com/office/drawing/2014/main" id="{FB800C3E-4CA6-D91D-8D1D-BB5CBF73BA7A}"/>
+            </a:ext>
+          </a:extLst>
+        </p:cNvPr>
+        <p:cNvGrpSpPr/>
+        <p:nvPr/>
+      </p:nvGrpSpPr>
+      <p:grpSpPr>
+        <a:xfrm>
+          <a:off x="0" y="0"/>
+          <a:ext cx="0" cy="0"/>
+          <a:chOff x="0" y="0"/>
+          <a:chExt cx="0" cy="0"/>
+        </a:xfrm>
+      </p:grpSpPr>
+      <p:sp>
+        <p:nvSpPr>
+          <p:cNvPr id="4" name="Rectangle 3">
+            <a:extLst>
+              <a:ext uri="{FF2B5EF4-FFF2-40B4-BE49-F238E27FC236}">
+                <a16:creationId xmlns:a16="http://schemas.microsoft.com/office/drawing/2014/main" id="{632D75CE-CBFF-C2FF-A144-9AB505A1E4C4}"/>
+              </a:ext>
+            </a:extLst>
+          </p:cNvPr>
+          <p:cNvSpPr/>
+          <p:nvPr/>
+        </p:nvSpPr>
+        <p:spPr>
+          <a:xfrm>
+            <a:off x="3757421" y="0"/>
+            <a:ext cx="4677158" cy="584775"/>
+          </a:xfrm>
+          <a:prstGeom prst="rect">
+            <a:avLst/>
+          </a:prstGeom>
+          <a:solidFill>
+            <a:schemeClr val="bg1"/>
+          </a:solidFill>
+        </p:spPr>
+        <p:txBody>
+          <a:bodyPr wrap="square" rtlCol="0" anchor="ctr">
+            <a:spAutoFit/>
+          </a:bodyPr>
+          <a:lstStyle/>
+          <a:p>
+            <a:pPr algn="ctr"/>
+            <a:r>
+              <a:rPr lang="en-US" sz="3200" b="1" dirty="0"/>
+              <a:t>Figure 1</a:t>
+            </a:r>
+            <a:endParaRPr lang="en-US" sz="3200" b="1" dirty="0">
+              <a:solidFill>
+                <a:schemeClr val="tx1"/>
+              </a:solidFill>
+            </a:endParaRPr>
+          </a:p>
+        </p:txBody>
+      </p:sp>
       <p:grpSp>
         <p:nvGrpSpPr>
           <p:cNvPr id="44" name="Group 43">
             <a:extLst>
               <a:ext uri="{FF2B5EF4-FFF2-40B4-BE49-F238E27FC236}">
-                <a16:creationId xmlns:a16="http://schemas.microsoft.com/office/drawing/2014/main" id="{931DA6DE-F740-47BF-4402-6EA9A7FA28CD}"/>
+                <a16:creationId xmlns:a16="http://schemas.microsoft.com/office/drawing/2014/main" id="{A29F9165-5D12-92CE-26EC-AF7FC1118BB9}"/>
               </a:ext>
             </a:extLst>
           </p:cNvPr>
@@ -3395,7 +3548,7 @@
             <p:cNvPr id="45" name="Rectangle 44">
               <a:extLst>
                 <a:ext uri="{FF2B5EF4-FFF2-40B4-BE49-F238E27FC236}">
-                  <a16:creationId xmlns:a16="http://schemas.microsoft.com/office/drawing/2014/main" id="{480ED0B5-7B4F-3961-69A2-41816672B69B}"/>
+                  <a16:creationId xmlns:a16="http://schemas.microsoft.com/office/drawing/2014/main" id="{ACB99893-8EE1-74F4-C172-328F8FC74D4C}"/>
                 </a:ext>
               </a:extLst>
             </p:cNvPr>
@@ -3469,7 +3622,7 @@
             <p:cNvPr id="46" name="TextBox 45">
               <a:extLst>
                 <a:ext uri="{FF2B5EF4-FFF2-40B4-BE49-F238E27FC236}">
-                  <a16:creationId xmlns:a16="http://schemas.microsoft.com/office/drawing/2014/main" id="{54DB6EFB-B9D4-847C-FBAD-737016FE480C}"/>
+                  <a16:creationId xmlns:a16="http://schemas.microsoft.com/office/drawing/2014/main" id="{660CEC11-D24F-F3CA-C416-1D202574F2F2}"/>
                 </a:ext>
               </a:extLst>
             </p:cNvPr>
@@ -3532,7 +3685,7 @@
             <p:cNvPr id="47" name="Rectangle 46">
               <a:extLst>
                 <a:ext uri="{FF2B5EF4-FFF2-40B4-BE49-F238E27FC236}">
-                  <a16:creationId xmlns:a16="http://schemas.microsoft.com/office/drawing/2014/main" id="{67B3CA77-0E6C-7DDE-6D12-2C1AEECEE088}"/>
+                  <a16:creationId xmlns:a16="http://schemas.microsoft.com/office/drawing/2014/main" id="{8BB5669A-0FDB-9C4E-CB0E-7A1580FE9BED}"/>
                 </a:ext>
               </a:extLst>
             </p:cNvPr>
@@ -3640,7 +3793,7 @@
             <p:cNvPr id="48" name="Rectangle 47">
               <a:extLst>
                 <a:ext uri="{FF2B5EF4-FFF2-40B4-BE49-F238E27FC236}">
-                  <a16:creationId xmlns:a16="http://schemas.microsoft.com/office/drawing/2014/main" id="{03AD6D97-3D45-E370-FCF7-1331C0BC6BDE}"/>
+                  <a16:creationId xmlns:a16="http://schemas.microsoft.com/office/drawing/2014/main" id="{857A7800-0B3C-0CD2-31A3-9096126F58CC}"/>
                 </a:ext>
               </a:extLst>
             </p:cNvPr>
@@ -3748,7 +3901,7 @@
             <p:cNvPr id="49" name="Rectangle 48">
               <a:extLst>
                 <a:ext uri="{FF2B5EF4-FFF2-40B4-BE49-F238E27FC236}">
-                  <a16:creationId xmlns:a16="http://schemas.microsoft.com/office/drawing/2014/main" id="{74D0D3BC-E987-7555-EAA6-0D64AAF4B257}"/>
+                  <a16:creationId xmlns:a16="http://schemas.microsoft.com/office/drawing/2014/main" id="{CF304CFB-7322-53B0-627D-FC24EC2397BD}"/>
                 </a:ext>
               </a:extLst>
             </p:cNvPr>
@@ -3856,7 +4009,7 @@
             <p:cNvPr id="50" name="Rectangle 49">
               <a:extLst>
                 <a:ext uri="{FF2B5EF4-FFF2-40B4-BE49-F238E27FC236}">
-                  <a16:creationId xmlns:a16="http://schemas.microsoft.com/office/drawing/2014/main" id="{2E5A0667-3AF3-3ACC-9E48-8E66676D2D4A}"/>
+                  <a16:creationId xmlns:a16="http://schemas.microsoft.com/office/drawing/2014/main" id="{DFA3388F-6AD6-CDAE-1AF5-C5C2CA6ED8C0}"/>
                 </a:ext>
               </a:extLst>
             </p:cNvPr>
@@ -3964,7 +4117,7 @@
             <p:cNvPr id="51" name="TextBox 50">
               <a:extLst>
                 <a:ext uri="{FF2B5EF4-FFF2-40B4-BE49-F238E27FC236}">
-                  <a16:creationId xmlns:a16="http://schemas.microsoft.com/office/drawing/2014/main" id="{2CC13EB8-6782-1614-2A67-9F4EFADCA9C0}"/>
+                  <a16:creationId xmlns:a16="http://schemas.microsoft.com/office/drawing/2014/main" id="{BE2B2B5E-39BE-FB2E-1662-C6EA52135358}"/>
                 </a:ext>
               </a:extLst>
             </p:cNvPr>
@@ -4027,7 +4180,7 @@
             <p:cNvPr id="52" name="Rectangle 51">
               <a:extLst>
                 <a:ext uri="{FF2B5EF4-FFF2-40B4-BE49-F238E27FC236}">
-                  <a16:creationId xmlns:a16="http://schemas.microsoft.com/office/drawing/2014/main" id="{2A3CADE1-2269-658A-78D3-5173AFA29AEC}"/>
+                  <a16:creationId xmlns:a16="http://schemas.microsoft.com/office/drawing/2014/main" id="{1966CEE0-99B8-65E0-8486-771793971326}"/>
                 </a:ext>
               </a:extLst>
             </p:cNvPr>
@@ -4133,7 +4286,7 @@
             <p:cNvPr id="53" name="Rectangle 52">
               <a:extLst>
                 <a:ext uri="{FF2B5EF4-FFF2-40B4-BE49-F238E27FC236}">
-                  <a16:creationId xmlns:a16="http://schemas.microsoft.com/office/drawing/2014/main" id="{B6723E4D-FC49-6CF4-3C35-5AC3C72F9335}"/>
+                  <a16:creationId xmlns:a16="http://schemas.microsoft.com/office/drawing/2014/main" id="{BBF370F0-7669-53F8-5FC1-2AAFDEE752CA}"/>
                 </a:ext>
               </a:extLst>
             </p:cNvPr>
@@ -4255,7 +4408,7 @@
             <p:cNvPr id="54" name="TextBox 53">
               <a:extLst>
                 <a:ext uri="{FF2B5EF4-FFF2-40B4-BE49-F238E27FC236}">
-                  <a16:creationId xmlns:a16="http://schemas.microsoft.com/office/drawing/2014/main" id="{74C5C932-B222-8332-A025-9824D9FCCDD5}"/>
+                  <a16:creationId xmlns:a16="http://schemas.microsoft.com/office/drawing/2014/main" id="{BEE3503C-C1A5-A714-2E05-90816ECFBFE1}"/>
                 </a:ext>
               </a:extLst>
             </p:cNvPr>
@@ -4318,7 +4471,7 @@
             <p:cNvPr id="55" name="Rectangle 54">
               <a:extLst>
                 <a:ext uri="{FF2B5EF4-FFF2-40B4-BE49-F238E27FC236}">
-                  <a16:creationId xmlns:a16="http://schemas.microsoft.com/office/drawing/2014/main" id="{161877B9-0DDB-CB16-CF7F-67E0FC065B57}"/>
+                  <a16:creationId xmlns:a16="http://schemas.microsoft.com/office/drawing/2014/main" id="{FC674184-1285-A284-5E41-1980F40DEB10}"/>
                 </a:ext>
               </a:extLst>
             </p:cNvPr>
@@ -4393,7 +4546,7 @@
             <p:cNvPr id="56" name="Rectangle 55">
               <a:extLst>
                 <a:ext uri="{FF2B5EF4-FFF2-40B4-BE49-F238E27FC236}">
-                  <a16:creationId xmlns:a16="http://schemas.microsoft.com/office/drawing/2014/main" id="{E409B706-5664-C7B6-FF9C-E69230B90DB5}"/>
+                  <a16:creationId xmlns:a16="http://schemas.microsoft.com/office/drawing/2014/main" id="{B6D5B455-69ED-9FA8-011D-A213A2D126A7}"/>
                 </a:ext>
               </a:extLst>
             </p:cNvPr>
@@ -4468,7 +4621,7 @@
             <p:cNvPr id="57" name="Rectangle 56">
               <a:extLst>
                 <a:ext uri="{FF2B5EF4-FFF2-40B4-BE49-F238E27FC236}">
-                  <a16:creationId xmlns:a16="http://schemas.microsoft.com/office/drawing/2014/main" id="{3B509C26-F15D-90A7-1374-AF9C95A7B2CA}"/>
+                  <a16:creationId xmlns:a16="http://schemas.microsoft.com/office/drawing/2014/main" id="{95AD63A6-E655-0590-72AC-9A3C828A8789}"/>
                 </a:ext>
               </a:extLst>
             </p:cNvPr>
@@ -4576,7 +4729,7 @@
             <p:cNvPr id="58" name="Rectangle 57">
               <a:extLst>
                 <a:ext uri="{FF2B5EF4-FFF2-40B4-BE49-F238E27FC236}">
-                  <a16:creationId xmlns:a16="http://schemas.microsoft.com/office/drawing/2014/main" id="{64CEE23B-CE7D-19DB-E0E7-D0632B7BB1CD}"/>
+                  <a16:creationId xmlns:a16="http://schemas.microsoft.com/office/drawing/2014/main" id="{504F44E0-0787-4307-2A7A-B753C061E5C9}"/>
                 </a:ext>
               </a:extLst>
             </p:cNvPr>
@@ -4684,7 +4837,7 @@
             <p:cNvPr id="59" name="Rectangle 58">
               <a:extLst>
                 <a:ext uri="{FF2B5EF4-FFF2-40B4-BE49-F238E27FC236}">
-                  <a16:creationId xmlns:a16="http://schemas.microsoft.com/office/drawing/2014/main" id="{3FAE967D-B4C1-AB04-443F-E1B408676A9E}"/>
+                  <a16:creationId xmlns:a16="http://schemas.microsoft.com/office/drawing/2014/main" id="{D8ACA0E8-B0F2-BAC6-1D7F-CA2C85211A8D}"/>
                 </a:ext>
               </a:extLst>
             </p:cNvPr>
@@ -4792,7 +4945,7 @@
             <p:cNvPr id="60" name="TextBox 59">
               <a:extLst>
                 <a:ext uri="{FF2B5EF4-FFF2-40B4-BE49-F238E27FC236}">
-                  <a16:creationId xmlns:a16="http://schemas.microsoft.com/office/drawing/2014/main" id="{F7CB2B5D-80C5-814F-F023-EB06FE0A7ABA}"/>
+                  <a16:creationId xmlns:a16="http://schemas.microsoft.com/office/drawing/2014/main" id="{FAD5157A-2C98-F7D2-8022-8939983A0E0B}"/>
                 </a:ext>
               </a:extLst>
             </p:cNvPr>
@@ -4855,7 +5008,7 @@
             <p:cNvPr id="61" name="Rectangle 60">
               <a:extLst>
                 <a:ext uri="{FF2B5EF4-FFF2-40B4-BE49-F238E27FC236}">
-                  <a16:creationId xmlns:a16="http://schemas.microsoft.com/office/drawing/2014/main" id="{85B1CDF5-8A43-5F8E-EAB5-1E4DDDE3C39F}"/>
+                  <a16:creationId xmlns:a16="http://schemas.microsoft.com/office/drawing/2014/main" id="{AA61F541-A1A6-7B27-3077-9C84B822F84F}"/>
                 </a:ext>
               </a:extLst>
             </p:cNvPr>
@@ -4930,7 +5083,7 @@
             <p:cNvPr id="62" name="Rectangle 61">
               <a:extLst>
                 <a:ext uri="{FF2B5EF4-FFF2-40B4-BE49-F238E27FC236}">
-                  <a16:creationId xmlns:a16="http://schemas.microsoft.com/office/drawing/2014/main" id="{C1A891C6-C9E9-21DC-1D6E-B0F1225EFC06}"/>
+                  <a16:creationId xmlns:a16="http://schemas.microsoft.com/office/drawing/2014/main" id="{5D72FB7C-C4B5-B50E-370D-4905930866C9}"/>
                 </a:ext>
               </a:extLst>
             </p:cNvPr>
@@ -5038,7 +5191,7 @@
             <p:cNvPr id="63" name="Rectangle 62">
               <a:extLst>
                 <a:ext uri="{FF2B5EF4-FFF2-40B4-BE49-F238E27FC236}">
-                  <a16:creationId xmlns:a16="http://schemas.microsoft.com/office/drawing/2014/main" id="{5B0831C0-C99F-4929-43D4-FCBC748E7326}"/>
+                  <a16:creationId xmlns:a16="http://schemas.microsoft.com/office/drawing/2014/main" id="{CC41AB4D-2E8E-898B-B098-C909625EA232}"/>
                 </a:ext>
               </a:extLst>
             </p:cNvPr>
@@ -5113,7 +5266,7 @@
             <p:cNvPr id="64" name="Rectangle 63">
               <a:extLst>
                 <a:ext uri="{FF2B5EF4-FFF2-40B4-BE49-F238E27FC236}">
-                  <a16:creationId xmlns:a16="http://schemas.microsoft.com/office/drawing/2014/main" id="{52C6995E-5DC8-E534-784D-EF5E831A776C}"/>
+                  <a16:creationId xmlns:a16="http://schemas.microsoft.com/office/drawing/2014/main" id="{812F8BE6-1AB6-F406-05B8-017544955249}"/>
                 </a:ext>
               </a:extLst>
             </p:cNvPr>
@@ -5188,7 +5341,7 @@
             <p:cNvPr id="65" name="Rectangle 64">
               <a:extLst>
                 <a:ext uri="{FF2B5EF4-FFF2-40B4-BE49-F238E27FC236}">
-                  <a16:creationId xmlns:a16="http://schemas.microsoft.com/office/drawing/2014/main" id="{FE5AE3DC-612E-A998-D220-4E2280C815F0}"/>
+                  <a16:creationId xmlns:a16="http://schemas.microsoft.com/office/drawing/2014/main" id="{82192E9C-81E0-4BBA-D8D6-D8FEE91DE32D}"/>
                 </a:ext>
               </a:extLst>
             </p:cNvPr>
@@ -5263,7 +5416,7 @@
             <p:cNvPr id="66" name="Rectangle 65">
               <a:extLst>
                 <a:ext uri="{FF2B5EF4-FFF2-40B4-BE49-F238E27FC236}">
-                  <a16:creationId xmlns:a16="http://schemas.microsoft.com/office/drawing/2014/main" id="{BF7CA4BB-99D6-E7F8-F219-1B51BA2D27CA}"/>
+                  <a16:creationId xmlns:a16="http://schemas.microsoft.com/office/drawing/2014/main" id="{4909929D-C7A7-2083-21AA-AEDECD935FE7}"/>
                 </a:ext>
               </a:extLst>
             </p:cNvPr>
@@ -5371,7 +5524,7 @@
             <p:cNvPr id="67" name="TextBox 66">
               <a:extLst>
                 <a:ext uri="{FF2B5EF4-FFF2-40B4-BE49-F238E27FC236}">
-                  <a16:creationId xmlns:a16="http://schemas.microsoft.com/office/drawing/2014/main" id="{0D2D96A6-8B33-F597-BDD2-E8EEF6A86C7A}"/>
+                  <a16:creationId xmlns:a16="http://schemas.microsoft.com/office/drawing/2014/main" id="{87DA19CE-0F54-CFC9-06BC-381D81AE2309}"/>
                 </a:ext>
               </a:extLst>
             </p:cNvPr>
@@ -5434,7 +5587,7 @@
             <p:cNvPr id="68" name="Rectangle 67">
               <a:extLst>
                 <a:ext uri="{FF2B5EF4-FFF2-40B4-BE49-F238E27FC236}">
-                  <a16:creationId xmlns:a16="http://schemas.microsoft.com/office/drawing/2014/main" id="{B36995E4-A8C8-70BF-15A9-C98AC43E3953}"/>
+                  <a16:creationId xmlns:a16="http://schemas.microsoft.com/office/drawing/2014/main" id="{70F7F507-34AA-8D5A-E41A-011C33419B87}"/>
                 </a:ext>
               </a:extLst>
             </p:cNvPr>
@@ -5556,7 +5709,7 @@
             <p:cNvPr id="69" name="Straight Arrow Connector 68">
               <a:extLst>
                 <a:ext uri="{FF2B5EF4-FFF2-40B4-BE49-F238E27FC236}">
-                  <a16:creationId xmlns:a16="http://schemas.microsoft.com/office/drawing/2014/main" id="{4F829FB9-15E9-E7A6-1ED8-CF4626ACB0C4}"/>
+                  <a16:creationId xmlns:a16="http://schemas.microsoft.com/office/drawing/2014/main" id="{BDD13360-A8BF-F266-B8C4-26DCF8CB9383}"/>
                 </a:ext>
               </a:extLst>
             </p:cNvPr>
@@ -5593,7 +5746,7 @@
             <p:cNvPr id="70" name="Straight Arrow Connector 52">
               <a:extLst>
                 <a:ext uri="{FF2B5EF4-FFF2-40B4-BE49-F238E27FC236}">
-                  <a16:creationId xmlns:a16="http://schemas.microsoft.com/office/drawing/2014/main" id="{93D02E4B-F0F4-E553-405A-8BAB120D0C85}"/>
+                  <a16:creationId xmlns:a16="http://schemas.microsoft.com/office/drawing/2014/main" id="{5F6DA252-F3E6-7155-223E-AA86C386A420}"/>
                 </a:ext>
               </a:extLst>
             </p:cNvPr>
@@ -5632,7 +5785,7 @@
             <p:cNvPr id="71" name="Straight Arrow Connector 55">
               <a:extLst>
                 <a:ext uri="{FF2B5EF4-FFF2-40B4-BE49-F238E27FC236}">
-                  <a16:creationId xmlns:a16="http://schemas.microsoft.com/office/drawing/2014/main" id="{8BF060FD-85A0-B900-2180-5E468E376B2A}"/>
+                  <a16:creationId xmlns:a16="http://schemas.microsoft.com/office/drawing/2014/main" id="{09FE4797-8415-254D-7269-78D9770DAD1D}"/>
                 </a:ext>
               </a:extLst>
             </p:cNvPr>
@@ -5671,7 +5824,7 @@
             <p:cNvPr id="72" name="Straight Arrow Connector 52">
               <a:extLst>
                 <a:ext uri="{FF2B5EF4-FFF2-40B4-BE49-F238E27FC236}">
-                  <a16:creationId xmlns:a16="http://schemas.microsoft.com/office/drawing/2014/main" id="{B95016FA-1B76-1047-F54E-FAE42B23CDBA}"/>
+                  <a16:creationId xmlns:a16="http://schemas.microsoft.com/office/drawing/2014/main" id="{36895181-1B2D-9ECA-A5DA-1DA81A526B51}"/>
                 </a:ext>
               </a:extLst>
             </p:cNvPr>
@@ -5710,7 +5863,7 @@
             <p:cNvPr id="73" name="Straight Arrow Connector 55">
               <a:extLst>
                 <a:ext uri="{FF2B5EF4-FFF2-40B4-BE49-F238E27FC236}">
-                  <a16:creationId xmlns:a16="http://schemas.microsoft.com/office/drawing/2014/main" id="{7E8E15B4-E5BE-FBF4-1184-267FEBC9AE27}"/>
+                  <a16:creationId xmlns:a16="http://schemas.microsoft.com/office/drawing/2014/main" id="{5EBE6258-6E86-01F5-0100-203DDDCCE0DF}"/>
                 </a:ext>
               </a:extLst>
             </p:cNvPr>
@@ -5749,7 +5902,7 @@
             <p:cNvPr id="74" name="Straight Arrow Connector 73">
               <a:extLst>
                 <a:ext uri="{FF2B5EF4-FFF2-40B4-BE49-F238E27FC236}">
-                  <a16:creationId xmlns:a16="http://schemas.microsoft.com/office/drawing/2014/main" id="{C1A4E50E-3653-410C-AC7A-DB539F0B372E}"/>
+                  <a16:creationId xmlns:a16="http://schemas.microsoft.com/office/drawing/2014/main" id="{AA8A442A-84F2-D930-9EF9-6ED12B038F68}"/>
                 </a:ext>
               </a:extLst>
             </p:cNvPr>
@@ -5786,7 +5939,7 @@
             <p:cNvPr id="75" name="Straight Connector 74">
               <a:extLst>
                 <a:ext uri="{FF2B5EF4-FFF2-40B4-BE49-F238E27FC236}">
-                  <a16:creationId xmlns:a16="http://schemas.microsoft.com/office/drawing/2014/main" id="{ABFFD0D0-B450-99BA-6BC7-03041846CFDD}"/>
+                  <a16:creationId xmlns:a16="http://schemas.microsoft.com/office/drawing/2014/main" id="{46CA285C-2882-0296-CA66-0267A59D977E}"/>
                 </a:ext>
               </a:extLst>
             </p:cNvPr>
@@ -5819,7 +5972,7 @@
             <p:cNvPr id="76" name="Straight Arrow Connector 55">
               <a:extLst>
                 <a:ext uri="{FF2B5EF4-FFF2-40B4-BE49-F238E27FC236}">
-                  <a16:creationId xmlns:a16="http://schemas.microsoft.com/office/drawing/2014/main" id="{A540600E-7CB3-7022-26D7-3EADABD4E314}"/>
+                  <a16:creationId xmlns:a16="http://schemas.microsoft.com/office/drawing/2014/main" id="{D9F90757-FB5F-69F3-D8E0-A238AD9340A4}"/>
                 </a:ext>
               </a:extLst>
             </p:cNvPr>
@@ -5858,7 +6011,7 @@
             <p:cNvPr id="77" name="Straight Arrow Connector 55">
               <a:extLst>
                 <a:ext uri="{FF2B5EF4-FFF2-40B4-BE49-F238E27FC236}">
-                  <a16:creationId xmlns:a16="http://schemas.microsoft.com/office/drawing/2014/main" id="{A7165943-0F4D-52D6-BAE6-5AE92329CF0A}"/>
+                  <a16:creationId xmlns:a16="http://schemas.microsoft.com/office/drawing/2014/main" id="{EC2F3F55-F665-F8D6-F876-90EF610801E1}"/>
                 </a:ext>
               </a:extLst>
             </p:cNvPr>
@@ -5897,7 +6050,7 @@
             <p:cNvPr id="78" name="Straight Arrow Connector 77">
               <a:extLst>
                 <a:ext uri="{FF2B5EF4-FFF2-40B4-BE49-F238E27FC236}">
-                  <a16:creationId xmlns:a16="http://schemas.microsoft.com/office/drawing/2014/main" id="{4E855D57-99A2-D4EE-C170-FC0C6FA1390B}"/>
+                  <a16:creationId xmlns:a16="http://schemas.microsoft.com/office/drawing/2014/main" id="{7783E729-5A6B-10BA-EDB4-498282921EC7}"/>
                 </a:ext>
               </a:extLst>
             </p:cNvPr>
@@ -5934,7 +6087,7 @@
             <p:cNvPr id="79" name="Straight Arrow Connector 78">
               <a:extLst>
                 <a:ext uri="{FF2B5EF4-FFF2-40B4-BE49-F238E27FC236}">
-                  <a16:creationId xmlns:a16="http://schemas.microsoft.com/office/drawing/2014/main" id="{76A588DA-4521-3C62-9B80-2C0718D7F6FF}"/>
+                  <a16:creationId xmlns:a16="http://schemas.microsoft.com/office/drawing/2014/main" id="{DCB12CB9-965B-80D5-CBA8-21A3DFC32AEC}"/>
                 </a:ext>
               </a:extLst>
             </p:cNvPr>
@@ -5971,7 +6124,7 @@
             <p:cNvPr id="80" name="Straight Arrow Connector 55">
               <a:extLst>
                 <a:ext uri="{FF2B5EF4-FFF2-40B4-BE49-F238E27FC236}">
-                  <a16:creationId xmlns:a16="http://schemas.microsoft.com/office/drawing/2014/main" id="{A9ED457E-53F3-8806-7C50-AFF06D60B87B}"/>
+                  <a16:creationId xmlns:a16="http://schemas.microsoft.com/office/drawing/2014/main" id="{82A041A2-F319-9D34-A6B6-DCDDED0DEAF9}"/>
                 </a:ext>
               </a:extLst>
             </p:cNvPr>
@@ -6010,7 +6163,7 @@
             <p:cNvPr id="81" name="Trapezoid 89">
               <a:extLst>
                 <a:ext uri="{FF2B5EF4-FFF2-40B4-BE49-F238E27FC236}">
-                  <a16:creationId xmlns:a16="http://schemas.microsoft.com/office/drawing/2014/main" id="{07A3E178-12C2-C151-9363-3C26F782EA51}"/>
+                  <a16:creationId xmlns:a16="http://schemas.microsoft.com/office/drawing/2014/main" id="{C7C12B8F-6DD8-67FA-F379-7F81F7842390}"/>
                 </a:ext>
               </a:extLst>
             </p:cNvPr>
@@ -6173,7 +6326,7 @@
             <p:cNvPr id="82" name="Straight Arrow Connector 55">
               <a:extLst>
                 <a:ext uri="{FF2B5EF4-FFF2-40B4-BE49-F238E27FC236}">
-                  <a16:creationId xmlns:a16="http://schemas.microsoft.com/office/drawing/2014/main" id="{FB2D0097-8001-57FC-BEAB-EFB6D0AED145}"/>
+                  <a16:creationId xmlns:a16="http://schemas.microsoft.com/office/drawing/2014/main" id="{6592CB52-0280-D8FF-790D-5BE6DD493DDB}"/>
                 </a:ext>
               </a:extLst>
             </p:cNvPr>
@@ -6211,7 +6364,7 @@
     </p:spTree>
     <p:extLst>
       <p:ext uri="{BB962C8B-B14F-4D97-AF65-F5344CB8AC3E}">
-        <p14:creationId xmlns:p14="http://schemas.microsoft.com/office/powerpoint/2010/main" val="2177176907"/>
+        <p14:creationId xmlns:p14="http://schemas.microsoft.com/office/powerpoint/2010/main" val="1210139746"/>
       </p:ext>
     </p:extLst>
   </p:cSld>
@@ -6221,7 +6374,7 @@
 </p:sld>
 </file>
 
-<file path=ppt/slides/slide2.xml><?xml version="1.0" encoding="utf-8"?>
+<file path=ppt/slides/slide3.xml><?xml version="1.0" encoding="utf-8"?>
 <p:sld xmlns:a="http://schemas.openxmlformats.org/drawingml/2006/main" xmlns:r="http://schemas.openxmlformats.org/officeDocument/2006/relationships" xmlns:p="http://schemas.openxmlformats.org/presentationml/2006/main">
   <p:cSld>
     <p:spTree>
@@ -6330,7 +6483,7 @@
 </p:sld>
 </file>
 
-<file path=ppt/slides/slide3.xml><?xml version="1.0" encoding="utf-8"?>
+<file path=ppt/slides/slide4.xml><?xml version="1.0" encoding="utf-8"?>
 <p:sld xmlns:a="http://schemas.openxmlformats.org/drawingml/2006/main" xmlns:r="http://schemas.openxmlformats.org/officeDocument/2006/relationships" xmlns:p="http://schemas.openxmlformats.org/presentationml/2006/main">
   <p:cSld>
     <p:spTree>
@@ -6456,7 +6609,7 @@
 </p:sld>
 </file>
 
-<file path=ppt/slides/slide4.xml><?xml version="1.0" encoding="utf-8"?>
+<file path=ppt/slides/slide5.xml><?xml version="1.0" encoding="utf-8"?>
 <p:sld xmlns:a="http://schemas.openxmlformats.org/drawingml/2006/main" xmlns:r="http://schemas.openxmlformats.org/officeDocument/2006/relationships" xmlns:p="http://schemas.openxmlformats.org/presentationml/2006/main">
   <p:cSld>
     <p:spTree>
@@ -6568,7 +6721,7 @@
 </p:sld>
 </file>
 
-<file path=ppt/slides/slide5.xml><?xml version="1.0" encoding="utf-8"?>
+<file path=ppt/slides/slide6.xml><?xml version="1.0" encoding="utf-8"?>
 <p:sld xmlns:a="http://schemas.openxmlformats.org/drawingml/2006/main" xmlns:r="http://schemas.openxmlformats.org/officeDocument/2006/relationships" xmlns:p="http://schemas.openxmlformats.org/presentationml/2006/main">
   <p:cSld>
     <p:spTree>
@@ -6680,7 +6833,7 @@
 </p:sld>
 </file>
 
-<file path=ppt/slides/slide6.xml><?xml version="1.0" encoding="utf-8"?>
+<file path=ppt/slides/slide7.xml><?xml version="1.0" encoding="utf-8"?>
 <p:sld xmlns:a="http://schemas.openxmlformats.org/drawingml/2006/main" xmlns:r="http://schemas.openxmlformats.org/officeDocument/2006/relationships" xmlns:p="http://schemas.openxmlformats.org/presentationml/2006/main">
   <p:cSld>
     <p:spTree>
@@ -6792,7 +6945,7 @@
 </p:sld>
 </file>
 
-<file path=ppt/slides/slide7.xml><?xml version="1.0" encoding="utf-8"?>
+<file path=ppt/slides/slide8.xml><?xml version="1.0" encoding="utf-8"?>
 <p:sld xmlns:a="http://schemas.openxmlformats.org/drawingml/2006/main" xmlns:r="http://schemas.openxmlformats.org/officeDocument/2006/relationships" xmlns:p="http://schemas.openxmlformats.org/presentationml/2006/main">
   <p:cSld>
     <p:spTree>
